--- a/Schools_ML_Track/camp_2026/slides/ML/ML03.pptx
+++ b/Schools_ML_Track/camp_2026/slides/ML/ML03.pptx
@@ -128,7 +128,7 @@
   <p:extLst>
     <p:ext uri="{521415D9-36F7-43E2-AB2F-B90AF26B5E84}">
       <p14:sectionLst xmlns:p14="http://schemas.microsoft.com/office/powerpoint/2010/main">
-        <p14:section name="Opening" id="{f33ac21e-89c1-46e9-b2dc-8c6971a93ffb}">
+        <p14:section name="Opening" id="{a64aea2e-2ce4-5ad1-0b13-b9b435ce548d}">
           <p14:sldIdLst>
             <p14:sldId id="256"/>
             <p14:sldId id="257"/>
@@ -139,7 +139,7 @@
             <p14:sldId id="262"/>
           </p14:sldIdLst>
         </p14:section>
-        <p14:section name="Block A" id="{727c6071-a7f4-6449-cabc-eca31e8a49f8}">
+        <p14:section name="Block A" id="{3df85b23-b3aa-a5a7-3545-74dec5016ab7}">
           <p14:sldIdLst>
             <p14:sldId id="263"/>
             <p14:sldId id="264"/>
@@ -149,15 +149,15 @@
             <p14:sldId id="269"/>
           </p14:sldIdLst>
         </p14:section>
-        <p14:section name="Break" id="{ab0ba163-e0d1-4ac8-7a07-a700e562531c}">
+        <p14:section name="Break" id="{95dbc163-a17e-d712-7fa0-b2bb0455690a}">
           <p14:sldIdLst>
             <p14:sldId id="267"/>
           </p14:sldIdLst>
         </p14:section>
-        <p14:section name="Block A" id="{1de36297-ef80-c7d4-29a0-dc64b9778ed5}">
+        <p14:section name="Block A" id="{52b00f7e-2a9e-2365-eb87-14e147e1d1c5}">
           <p14:sldIdLst/>
         </p14:section>
-        <p14:section name="Block B" id="{c076422a-196d-9716-42d0-fe7dfc86b6d6}">
+        <p14:section name="Block B" id="{64888814-7f31-dd98-3c34-f988dfc7c735}">
           <p14:sldIdLst>
             <p14:sldId id="270"/>
             <p14:sldId id="271"/>
@@ -166,7 +166,7 @@
             <p14:sldId id="274"/>
           </p14:sldIdLst>
         </p14:section>
-        <p14:section name="Make and close" id="{e295fc3f-e28b-d524-ed61-ded3c9ad0dc4}">
+        <p14:section name="Make and close" id="{efd3a8c7-56a3-b520-f63a-b38e82ad75aa}">
           <p14:sldIdLst>
             <p14:sldId id="275"/>
             <p14:sldId id="276"/>

--- a/Schools_ML_Track/camp_2026/slides/ML/ML03.pptx
+++ b/Schools_ML_Track/camp_2026/slides/ML/ML03.pptx
@@ -128,7 +128,7 @@
   <p:extLst>
     <p:ext uri="{521415D9-36F7-43E2-AB2F-B90AF26B5E84}">
       <p14:sectionLst xmlns:p14="http://schemas.microsoft.com/office/powerpoint/2010/main">
-        <p14:section name="Opening" id="{a64aea2e-2ce4-5ad1-0b13-b9b435ce548d}">
+        <p14:section name="Opening" id="{ad54bf3d-6d9d-1e77-1276-88434ebc0434}">
           <p14:sldIdLst>
             <p14:sldId id="256"/>
             <p14:sldId id="257"/>
@@ -139,7 +139,7 @@
             <p14:sldId id="262"/>
           </p14:sldIdLst>
         </p14:section>
-        <p14:section name="Block A" id="{3df85b23-b3aa-a5a7-3545-74dec5016ab7}">
+        <p14:section name="Block A" id="{065d29d2-c57b-47a3-db6f-f1fdee84c6fb}">
           <p14:sldIdLst>
             <p14:sldId id="263"/>
             <p14:sldId id="264"/>
@@ -149,15 +149,15 @@
             <p14:sldId id="269"/>
           </p14:sldIdLst>
         </p14:section>
-        <p14:section name="Break" id="{95dbc163-a17e-d712-7fa0-b2bb0455690a}">
+        <p14:section name="Break" id="{0bd4e4b8-40b9-c8eb-54e2-58dc30036523}">
           <p14:sldIdLst>
             <p14:sldId id="267"/>
           </p14:sldIdLst>
         </p14:section>
-        <p14:section name="Block A" id="{52b00f7e-2a9e-2365-eb87-14e147e1d1c5}">
+        <p14:section name="Block A" id="{393e03fc-86c5-6175-0ea4-e5699a0a48f4}">
           <p14:sldIdLst/>
         </p14:section>
-        <p14:section name="Block B" id="{64888814-7f31-dd98-3c34-f988dfc7c735}">
+        <p14:section name="Block B" id="{4b550796-db39-af8c-7cfb-0cec2fa1a7d2}">
           <p14:sldIdLst>
             <p14:sldId id="270"/>
             <p14:sldId id="271"/>
@@ -166,7 +166,7 @@
             <p14:sldId id="274"/>
           </p14:sldIdLst>
         </p14:section>
-        <p14:section name="Make and close" id="{efd3a8c7-56a3-b520-f63a-b38e82ad75aa}">
+        <p14:section name="Make and close" id="{76aae785-20ac-b6af-eea2-1dc83f454ee3}">
           <p14:sldIdLst>
             <p14:sldId id="275"/>
             <p14:sldId id="276"/>
@@ -3197,7 +3197,24 @@
                 <a:ea typeface="Lato" pitchFamily="34" charset="-122"/>
                 <a:cs typeface="Lato" pitchFamily="34" charset="-120"/>
               </a:rPr>
-              <a:t>Arithmetic, converting text and reading errors</a:t>
+              <a:t>Arithmetic, converting</a:t>
+            </a:r>
+            <a:endParaRPr lang="en-US" sz="5600" dirty="0"/>
+          </a:p>
+          <a:p>
+            <a:pPr algn="l" indent="0" marL="0">
+              <a:buNone/>
+            </a:pPr>
+            <a:r>
+              <a:rPr lang="en-US" sz="5600" b="1" dirty="0">
+                <a:solidFill>
+                  <a:srgbClr val="FFFFFF"/>
+                </a:solidFill>
+                <a:latin typeface="Lato" pitchFamily="34" charset="0"/>
+                <a:ea typeface="Lato" pitchFamily="34" charset="-122"/>
+                <a:cs typeface="Lato" pitchFamily="34" charset="-120"/>
+              </a:rPr>
+              <a:t>text and reading errors</a:t>
             </a:r>
             <a:endParaRPr lang="en-US" sz="5600" dirty="0"/>
           </a:p>
@@ -3647,230 +3664,30 @@
           </a:p>
         </p:txBody>
       </p:sp>
-      <p:sp>
-        <p:nvSpPr>
-          <p:cNvPr id="4" name="Shape 2"/>
-          <p:cNvSpPr/>
+      <p:pic>
+        <p:nvPicPr>
+          <p:cNvPr id="4" name="Image 0" descr="Change one thing">    </p:cNvPr>
+          <p:cNvPicPr>
+            <a:picLocks noChangeAspect="1"/>
+          </p:cNvPicPr>
           <p:nvPr/>
-        </p:nvSpPr>
-        <p:spPr>
-          <a:xfrm>
-            <a:off x="7223760" y="1737360"/>
-            <a:ext cx="4297680" cy="2519172"/>
-          </a:xfrm>
-          <a:prstGeom prst="roundRect">
-            <a:avLst>
-              <a:gd name="adj" fmla="val 2904"/>
-            </a:avLst>
-          </a:prstGeom>
-          <a:solidFill>
-            <a:srgbClr val="111111"/>
-          </a:solidFill>
-          <a:ln/>
-        </p:spPr>
-      </p:sp>
-      <p:sp>
-        <p:nvSpPr>
-          <p:cNvPr id="5" name="Text 3"/>
-          <p:cNvSpPr txBox="1"/>
-          <p:nvPr/>
-        </p:nvSpPr>
-        <p:spPr>
-          <a:xfrm>
-            <a:off x="7424928" y="1938528"/>
-            <a:ext cx="3895344" cy="2116836"/>
-          </a:xfrm>
-          <a:prstGeom prst="rect">
-            <a:avLst/>
-          </a:prstGeom>
-          <a:noFill/>
-          <a:ln/>
-        </p:spPr>
-        <p:txBody>
-          <a:bodyPr wrap="square" lIns="0" tIns="0" rIns="0" bIns="0" rtlCol="0" anchor="t"/>
-          <a:lstStyle/>
-          <a:p>
-            <a:pPr algn="l" indent="0" marL="0">
-              <a:lnSpc>
-                <a:spcPts val="1820"/>
-              </a:lnSpc>
-              <a:buNone/>
-            </a:pPr>
-            <a:r>
-              <a:rPr lang="en-US" sz="1400" dirty="0">
-                <a:solidFill>
-                  <a:srgbClr val="FFFFFF"/>
-                </a:solidFill>
-                <a:latin typeface="Courier New" pitchFamily="34" charset="0"/>
-                <a:ea typeface="Courier New" pitchFamily="34" charset="-122"/>
-                <a:cs typeface="Courier New" pitchFamily="34" charset="-120"/>
-              </a:rPr>
-              <a:t>price = 3000</a:t>
-            </a:r>
-            <a:endParaRPr lang="en-US" sz="1400" dirty="0"/>
-          </a:p>
-          <a:p>
-            <a:pPr algn="l" indent="0" marL="0">
-              <a:lnSpc>
-                <a:spcPts val="1820"/>
-              </a:lnSpc>
-              <a:buNone/>
-            </a:pPr>
-            <a:r>
-              <a:rPr lang="en-US" sz="1400" dirty="0">
-                <a:solidFill>
-                  <a:srgbClr val="FFFFFF"/>
-                </a:solidFill>
-                <a:latin typeface="Courier New" pitchFamily="34" charset="0"/>
-                <a:ea typeface="Courier New" pitchFamily="34" charset="-122"/>
-                <a:cs typeface="Courier New" pitchFamily="34" charset="-120"/>
-              </a:rPr>
-              <a:t>total = price * 4</a:t>
-            </a:r>
-            <a:endParaRPr lang="en-US" sz="1400" dirty="0"/>
-          </a:p>
-          <a:p>
-            <a:pPr algn="l" indent="0" marL="0">
-              <a:lnSpc>
-                <a:spcPts val="1820"/>
-              </a:lnSpc>
-              <a:buNone/>
-            </a:pPr>
-            <a:r>
-              <a:rPr lang="en-US" sz="1400" dirty="0">
-                <a:solidFill>
-                  <a:srgbClr val="FFFFFF"/>
-                </a:solidFill>
-                <a:latin typeface="Courier New" pitchFamily="34" charset="0"/>
-                <a:ea typeface="Courier New" pitchFamily="34" charset="-122"/>
-                <a:cs typeface="Courier New" pitchFamily="34" charset="-120"/>
-              </a:rPr>
-              <a:t>share = price / 4</a:t>
-            </a:r>
-            <a:endParaRPr lang="en-US" sz="1400" dirty="0"/>
-          </a:p>
-          <a:p>
-            <a:pPr algn="l" indent="0" marL="0">
-              <a:lnSpc>
-                <a:spcPts val="1820"/>
-              </a:lnSpc>
-              <a:buNone/>
-            </a:pPr>
-            <a:r>
-              <a:rPr lang="en-US" sz="1400" dirty="0">
-                <a:solidFill>
-                  <a:srgbClr val="FFFFFF"/>
-                </a:solidFill>
-                <a:latin typeface="Courier New" pitchFamily="34" charset="0"/>
-                <a:ea typeface="Courier New" pitchFamily="34" charset="-122"/>
-                <a:cs typeface="Courier New" pitchFamily="34" charset="-120"/>
-              </a:rPr>
-              <a:t>no_brackets = price - 500 * 2</a:t>
-            </a:r>
-            <a:endParaRPr lang="en-US" sz="1400" dirty="0"/>
-          </a:p>
-          <a:p>
-            <a:pPr algn="l" indent="0" marL="0">
-              <a:lnSpc>
-                <a:spcPts val="1820"/>
-              </a:lnSpc>
-              <a:buNone/>
-            </a:pPr>
-            <a:r>
-              <a:rPr lang="en-US" sz="1400" dirty="0">
-                <a:solidFill>
-                  <a:srgbClr val="FFFFFF"/>
-                </a:solidFill>
-                <a:latin typeface="Courier New" pitchFamily="34" charset="0"/>
-                <a:ea typeface="Courier New" pitchFamily="34" charset="-122"/>
-                <a:cs typeface="Courier New" pitchFamily="34" charset="-120"/>
-              </a:rPr>
-              <a:t>with_brackets = (price - 500) * 2</a:t>
-            </a:r>
-            <a:endParaRPr lang="en-US" sz="1400" dirty="0"/>
-          </a:p>
-          <a:p>
-            <a:pPr algn="l" indent="0" marL="0">
-              <a:lnSpc>
-                <a:spcPts val="1820"/>
-              </a:lnSpc>
-              <a:buNone/>
-            </a:pPr>
-            <a:r>
-              <a:rPr lang="en-US" sz="1400" dirty="0">
-                <a:solidFill>
-                  <a:srgbClr val="FFFFFF"/>
-                </a:solidFill>
-                <a:latin typeface="Courier New" pitchFamily="34" charset="0"/>
-                <a:ea typeface="Courier New" pitchFamily="34" charset="-122"/>
-                <a:cs typeface="Courier New" pitchFamily="34" charset="-120"/>
-              </a:rPr>
-              <a:t>print(</a:t>
-            </a:r>
-            <a:endParaRPr lang="en-US" sz="1400" dirty="0"/>
-          </a:p>
-          <a:p>
-            <a:pPr algn="l" indent="0" marL="0">
-              <a:lnSpc>
-                <a:spcPts val="1820"/>
-              </a:lnSpc>
-              <a:buNone/>
-            </a:pPr>
-            <a:r>
-              <a:rPr lang="en-US" sz="1400" dirty="0">
-                <a:solidFill>
-                  <a:srgbClr val="FFFFFF"/>
-                </a:solidFill>
-                <a:latin typeface="Courier New" pitchFamily="34" charset="0"/>
-                <a:ea typeface="Courier New" pitchFamily="34" charset="-122"/>
-                <a:cs typeface="Courier New" pitchFamily="34" charset="-120"/>
-              </a:rPr>
-              <a:t>    total, share, no_brackets,</a:t>
-            </a:r>
-            <a:endParaRPr lang="en-US" sz="1400" dirty="0"/>
-          </a:p>
-          <a:p>
-            <a:pPr algn="l" indent="0" marL="0">
-              <a:lnSpc>
-                <a:spcPts val="1820"/>
-              </a:lnSpc>
-              <a:buNone/>
-            </a:pPr>
-            <a:r>
-              <a:rPr lang="en-US" sz="1400" dirty="0">
-                <a:solidFill>
-                  <a:srgbClr val="FFFFFF"/>
-                </a:solidFill>
-                <a:latin typeface="Courier New" pitchFamily="34" charset="0"/>
-                <a:ea typeface="Courier New" pitchFamily="34" charset="-122"/>
-                <a:cs typeface="Courier New" pitchFamily="34" charset="-120"/>
-              </a:rPr>
-              <a:t>    with_brackets</a:t>
-            </a:r>
-            <a:endParaRPr lang="en-US" sz="1400" dirty="0"/>
-          </a:p>
-          <a:p>
-            <a:pPr algn="l" indent="0" marL="0">
-              <a:lnSpc>
-                <a:spcPts val="1820"/>
-              </a:lnSpc>
-              <a:buNone/>
-            </a:pPr>
-            <a:r>
-              <a:rPr lang="en-US" sz="1400" dirty="0">
-                <a:solidFill>
-                  <a:srgbClr val="FFFFFF"/>
-                </a:solidFill>
-                <a:latin typeface="Courier New" pitchFamily="34" charset="0"/>
-                <a:ea typeface="Courier New" pitchFamily="34" charset="-122"/>
-                <a:cs typeface="Courier New" pitchFamily="34" charset="-120"/>
-              </a:rPr>
-              <a:t>)</a:t>
-            </a:r>
-            <a:endParaRPr lang="en-US" sz="1400" dirty="0"/>
-          </a:p>
-        </p:txBody>
-      </p:sp>
+        </p:nvPicPr>
+        <p:blipFill>
+          <a:blip r:embed="rId1"/>
+          <a:stretch>
+            <a:fillRect/>
+          </a:stretch>
+        </p:blipFill>
+        <p:spPr>
+          <a:xfrm>
+            <a:off x="9418320" y="2103120"/>
+            <a:ext cx="1828800" cy="1828800"/>
+          </a:xfrm>
+          <a:prstGeom prst="rect">
+            <a:avLst/>
+          </a:prstGeom>
+        </p:spPr>
+      </p:pic>
       <p:sp>
         <p:nvSpPr>
           <p:cNvPr id="25" name="Slide Number Placeholder 0"/>
@@ -6408,15 +6225,15 @@
           <a:p>
             <a:pPr algn="l" indent="0" marL="0">
               <a:lnSpc>
-                <a:spcPts val="3600"/>
+                <a:spcPts val="3360"/>
               </a:lnSpc>
               <a:spcAft>
-                <a:spcPts val="2520"/>
+                <a:spcPts val="2020"/>
               </a:spcAft>
               <a:buNone/>
             </a:pPr>
             <a:r>
-              <a:rPr lang="en-US" sz="3000" dirty="0">
+              <a:rPr lang="en-US" sz="2800" dirty="0">
                 <a:solidFill>
                   <a:srgbClr val="111111"/>
                 </a:solidFill>
@@ -6424,22 +6241,22 @@
                 <a:ea typeface="Lato" pitchFamily="34" charset="-122"/>
                 <a:cs typeface="Lato" pitchFamily="34" charset="-120"/>
               </a:rPr>
-              <a:t>Convert "12.5" to a number and calculate the price of four items. Predict the answer before you run it. Explain why nobody can divide by zero.</a:t>
-            </a:r>
-            <a:endParaRPr lang="en-US" sz="3000" dirty="0"/>
+              <a:t>Convert "12.5" to a number and calculate the price of four items.</a:t>
+            </a:r>
+            <a:endParaRPr lang="en-US" sz="2800" dirty="0"/>
           </a:p>
           <a:p>
             <a:pPr algn="l" indent="0" marL="0">
               <a:lnSpc>
-                <a:spcPts val="3600"/>
+                <a:spcPts val="3360"/>
               </a:lnSpc>
               <a:spcAft>
-                <a:spcPts val="2520"/>
+                <a:spcPts val="2020"/>
               </a:spcAft>
               <a:buNone/>
             </a:pPr>
             <a:r>
-              <a:rPr lang="en-US" sz="3000" dirty="0">
+              <a:rPr lang="en-US" sz="2800" dirty="0">
                 <a:solidFill>
                   <a:srgbClr val="111111"/>
                 </a:solidFill>
@@ -6447,9 +6264,55 @@
                 <a:ea typeface="Lato" pitchFamily="34" charset="-122"/>
                 <a:cs typeface="Lato" pitchFamily="34" charset="-120"/>
               </a:rPr>
+              <a:t>Predict the answer before you run it.</a:t>
+            </a:r>
+            <a:endParaRPr lang="en-US" sz="2800" dirty="0"/>
+          </a:p>
+          <a:p>
+            <a:pPr algn="l" indent="0" marL="0">
+              <a:lnSpc>
+                <a:spcPts val="3360"/>
+              </a:lnSpc>
+              <a:spcAft>
+                <a:spcPts val="2020"/>
+              </a:spcAft>
+              <a:buNone/>
+            </a:pPr>
+            <a:r>
+              <a:rPr lang="en-US" sz="2800" dirty="0">
+                <a:solidFill>
+                  <a:srgbClr val="111111"/>
+                </a:solidFill>
+                <a:latin typeface="Lato" pitchFamily="34" charset="0"/>
+                <a:ea typeface="Lato" pitchFamily="34" charset="-122"/>
+                <a:cs typeface="Lato" pitchFamily="34" charset="-120"/>
+              </a:rPr>
+              <a:t>Explain why nobody can divide by zero.</a:t>
+            </a:r>
+            <a:endParaRPr lang="en-US" sz="2800" dirty="0"/>
+          </a:p>
+          <a:p>
+            <a:pPr algn="l" indent="0" marL="0">
+              <a:lnSpc>
+                <a:spcPts val="3360"/>
+              </a:lnSpc>
+              <a:spcAft>
+                <a:spcPts val="2020"/>
+              </a:spcAft>
+              <a:buNone/>
+            </a:pPr>
+            <a:r>
+              <a:rPr lang="en-US" sz="2800" dirty="0">
+                <a:solidFill>
+                  <a:srgbClr val="111111"/>
+                </a:solidFill>
+                <a:latin typeface="Lato" pitchFamily="34" charset="0"/>
+                <a:ea typeface="Lato" pitchFamily="34" charset="-122"/>
+                <a:cs typeface="Lato" pitchFamily="34" charset="-120"/>
+              </a:rPr>
               <a:t>Save it as ML03. Write two sentences: what you changed and how you checked it.</a:t>
             </a:r>
-            <a:endParaRPr lang="en-US" sz="3000" dirty="0"/>
+            <a:endParaRPr lang="en-US" sz="2800" dirty="0"/>
           </a:p>
         </p:txBody>
       </p:sp>
